--- a/~sasano/lecture/pn2/26/P01.pptx
+++ b/~sasano/lecture/pn2/26/P01.pptx
@@ -258,7 +258,7 @@
           <a:p>
             <a:fld id="{DC3775AB-837E-6842-A901-4DC6AA024842}" type="datetimeFigureOut">
               <a:rPr kumimoji="1" lang="ja-JP" altLang="en-US" smtClean="0"/>
-              <a:t>2026/1/13</a:t>
+              <a:t>2026/9/28</a:t>
             </a:fld>
             <a:endParaRPr kumimoji="1" lang="ja-JP" altLang="en-US"/>
           </a:p>
@@ -424,7 +424,7 @@
           <a:p>
             <a:fld id="{DFA362BF-D8A0-C64F-AB24-D7A33CA63938}" type="datetimeFigureOut">
               <a:rPr kumimoji="1" lang="ja-JP" altLang="en-US" smtClean="0"/>
-              <a:t>2026/1/13</a:t>
+              <a:t>2026/9/28</a:t>
             </a:fld>
             <a:endParaRPr kumimoji="1" lang="ja-JP" altLang="en-US"/>
           </a:p>
@@ -756,14 +756,14 @@
           <a:ln/>
           <a:extLst>
             <a:ext uri="{909E8E84-426E-40dd-AFC4-6F175D3DCCD1}">
-              <a14:hiddenFill xmlns:a14="http://schemas.microsoft.com/office/drawing/2010/main" xmlns="">
+              <a14:hiddenFill xmlns="" xmlns:a14="http://schemas.microsoft.com/office/drawing/2010/main">
                 <a:solidFill>
                   <a:srgbClr val="FFFFFF"/>
                 </a:solidFill>
               </a14:hiddenFill>
             </a:ext>
             <a:ext uri="{91240B29-F687-4f45-9708-019B960494DF}">
-              <a14:hiddenLine xmlns:a14="http://schemas.microsoft.com/office/drawing/2010/main" xmlns="" w="9525">
+              <a14:hiddenLine xmlns="" xmlns:a14="http://schemas.microsoft.com/office/drawing/2010/main" w="9525">
                 <a:solidFill>
                   <a:srgbClr val="000000"/>
                 </a:solidFill>
@@ -939,14 +939,14 @@
           <a:ln/>
           <a:extLst>
             <a:ext uri="{909E8E84-426E-40dd-AFC4-6F175D3DCCD1}">
-              <a14:hiddenFill xmlns:a14="http://schemas.microsoft.com/office/drawing/2010/main" xmlns="">
+              <a14:hiddenFill xmlns="" xmlns:a14="http://schemas.microsoft.com/office/drawing/2010/main">
                 <a:solidFill>
                   <a:srgbClr val="FFFFFF"/>
                 </a:solidFill>
               </a14:hiddenFill>
             </a:ext>
             <a:ext uri="{91240B29-F687-4f45-9708-019B960494DF}">
-              <a14:hiddenLine xmlns:a14="http://schemas.microsoft.com/office/drawing/2010/main" xmlns="" w="9525">
+              <a14:hiddenLine xmlns="" xmlns:a14="http://schemas.microsoft.com/office/drawing/2010/main" w="9525">
                 <a:solidFill>
                   <a:srgbClr val="000000"/>
                 </a:solidFill>
@@ -956,7 +956,7 @@
               </a14:hiddenLine>
             </a:ext>
             <a:ext uri="{FAA26D3D-D897-4be2-8F04-BA451C77F1D7}">
-              <ma14:placeholderFlag xmlns:ma14="http://schemas.microsoft.com/office/mac/drawingml/2011/main" xmlns="" val="1"/>
+              <ma14:placeholderFlag xmlns="" xmlns:ma14="http://schemas.microsoft.com/office/mac/drawingml/2011/main" val="1"/>
             </a:ext>
           </a:extLst>
         </p:spPr>
@@ -1017,14 +1017,14 @@
           <a:ln/>
           <a:extLst>
             <a:ext uri="{909E8E84-426E-40dd-AFC4-6F175D3DCCD1}">
-              <a14:hiddenFill xmlns:a14="http://schemas.microsoft.com/office/drawing/2010/main" xmlns="">
+              <a14:hiddenFill xmlns="" xmlns:a14="http://schemas.microsoft.com/office/drawing/2010/main">
                 <a:solidFill>
                   <a:srgbClr val="FFFFFF"/>
                 </a:solidFill>
               </a14:hiddenFill>
             </a:ext>
             <a:ext uri="{91240B29-F687-4f45-9708-019B960494DF}">
-              <a14:hiddenLine xmlns:a14="http://schemas.microsoft.com/office/drawing/2010/main" xmlns="" w="9525">
+              <a14:hiddenLine xmlns="" xmlns:a14="http://schemas.microsoft.com/office/drawing/2010/main" w="9525">
                 <a:solidFill>
                   <a:srgbClr val="000000"/>
                 </a:solidFill>
@@ -1200,14 +1200,14 @@
           <a:ln/>
           <a:extLst>
             <a:ext uri="{909E8E84-426E-40dd-AFC4-6F175D3DCCD1}">
-              <a14:hiddenFill xmlns:a14="http://schemas.microsoft.com/office/drawing/2010/main" xmlns="">
+              <a14:hiddenFill xmlns="" xmlns:a14="http://schemas.microsoft.com/office/drawing/2010/main">
                 <a:solidFill>
                   <a:srgbClr val="FFFFFF"/>
                 </a:solidFill>
               </a14:hiddenFill>
             </a:ext>
             <a:ext uri="{91240B29-F687-4f45-9708-019B960494DF}">
-              <a14:hiddenLine xmlns:a14="http://schemas.microsoft.com/office/drawing/2010/main" xmlns="" w="9525">
+              <a14:hiddenLine xmlns="" xmlns:a14="http://schemas.microsoft.com/office/drawing/2010/main" w="9525">
                 <a:solidFill>
                   <a:srgbClr val="000000"/>
                 </a:solidFill>
@@ -1217,7 +1217,7 @@
               </a14:hiddenLine>
             </a:ext>
             <a:ext uri="{FAA26D3D-D897-4be2-8F04-BA451C77F1D7}">
-              <ma14:placeholderFlag xmlns:ma14="http://schemas.microsoft.com/office/mac/drawingml/2011/main" xmlns="" val="1"/>
+              <ma14:placeholderFlag xmlns="" xmlns:ma14="http://schemas.microsoft.com/office/mac/drawingml/2011/main" val="1"/>
             </a:ext>
           </a:extLst>
         </p:spPr>
@@ -1278,14 +1278,14 @@
           <a:ln/>
           <a:extLst>
             <a:ext uri="{909E8E84-426E-40dd-AFC4-6F175D3DCCD1}">
-              <a14:hiddenFill xmlns:a14="http://schemas.microsoft.com/office/drawing/2010/main" xmlns="">
+              <a14:hiddenFill xmlns="" xmlns:a14="http://schemas.microsoft.com/office/drawing/2010/main">
                 <a:solidFill>
                   <a:srgbClr val="FFFFFF"/>
                 </a:solidFill>
               </a14:hiddenFill>
             </a:ext>
             <a:ext uri="{91240B29-F687-4f45-9708-019B960494DF}">
-              <a14:hiddenLine xmlns:a14="http://schemas.microsoft.com/office/drawing/2010/main" xmlns="" w="9525">
+              <a14:hiddenLine xmlns="" xmlns:a14="http://schemas.microsoft.com/office/drawing/2010/main" w="9525">
                 <a:solidFill>
                   <a:srgbClr val="000000"/>
                 </a:solidFill>
@@ -1461,14 +1461,14 @@
           <a:ln/>
           <a:extLst>
             <a:ext uri="{909E8E84-426E-40dd-AFC4-6F175D3DCCD1}">
-              <a14:hiddenFill xmlns:a14="http://schemas.microsoft.com/office/drawing/2010/main" xmlns="">
+              <a14:hiddenFill xmlns="" xmlns:a14="http://schemas.microsoft.com/office/drawing/2010/main">
                 <a:solidFill>
                   <a:srgbClr val="FFFFFF"/>
                 </a:solidFill>
               </a14:hiddenFill>
             </a:ext>
             <a:ext uri="{91240B29-F687-4f45-9708-019B960494DF}">
-              <a14:hiddenLine xmlns:a14="http://schemas.microsoft.com/office/drawing/2010/main" xmlns="" w="9525">
+              <a14:hiddenLine xmlns="" xmlns:a14="http://schemas.microsoft.com/office/drawing/2010/main" w="9525">
                 <a:solidFill>
                   <a:srgbClr val="000000"/>
                 </a:solidFill>
@@ -1478,7 +1478,7 @@
               </a14:hiddenLine>
             </a:ext>
             <a:ext uri="{FAA26D3D-D897-4be2-8F04-BA451C77F1D7}">
-              <ma14:placeholderFlag xmlns:ma14="http://schemas.microsoft.com/office/mac/drawingml/2011/main" xmlns="" val="1"/>
+              <ma14:placeholderFlag xmlns="" xmlns:ma14="http://schemas.microsoft.com/office/mac/drawingml/2011/main" val="1"/>
             </a:ext>
           </a:extLst>
         </p:spPr>
@@ -1539,14 +1539,14 @@
           <a:ln/>
           <a:extLst>
             <a:ext uri="{909E8E84-426E-40dd-AFC4-6F175D3DCCD1}">
-              <a14:hiddenFill xmlns:a14="http://schemas.microsoft.com/office/drawing/2010/main" xmlns="">
+              <a14:hiddenFill xmlns="" xmlns:a14="http://schemas.microsoft.com/office/drawing/2010/main">
                 <a:solidFill>
                   <a:srgbClr val="FFFFFF"/>
                 </a:solidFill>
               </a14:hiddenFill>
             </a:ext>
             <a:ext uri="{91240B29-F687-4f45-9708-019B960494DF}">
-              <a14:hiddenLine xmlns:a14="http://schemas.microsoft.com/office/drawing/2010/main" xmlns="" w="9525">
+              <a14:hiddenLine xmlns="" xmlns:a14="http://schemas.microsoft.com/office/drawing/2010/main" w="9525">
                 <a:solidFill>
                   <a:srgbClr val="000000"/>
                 </a:solidFill>
@@ -1722,14 +1722,14 @@
           <a:ln/>
           <a:extLst>
             <a:ext uri="{909E8E84-426E-40dd-AFC4-6F175D3DCCD1}">
-              <a14:hiddenFill xmlns:a14="http://schemas.microsoft.com/office/drawing/2010/main" xmlns="">
+              <a14:hiddenFill xmlns="" xmlns:a14="http://schemas.microsoft.com/office/drawing/2010/main">
                 <a:solidFill>
                   <a:srgbClr val="FFFFFF"/>
                 </a:solidFill>
               </a14:hiddenFill>
             </a:ext>
             <a:ext uri="{91240B29-F687-4f45-9708-019B960494DF}">
-              <a14:hiddenLine xmlns:a14="http://schemas.microsoft.com/office/drawing/2010/main" xmlns="" w="9525">
+              <a14:hiddenLine xmlns="" xmlns:a14="http://schemas.microsoft.com/office/drawing/2010/main" w="9525">
                 <a:solidFill>
                   <a:srgbClr val="000000"/>
                 </a:solidFill>
@@ -1739,7 +1739,7 @@
               </a14:hiddenLine>
             </a:ext>
             <a:ext uri="{FAA26D3D-D897-4be2-8F04-BA451C77F1D7}">
-              <ma14:placeholderFlag xmlns:ma14="http://schemas.microsoft.com/office/mac/drawingml/2011/main" xmlns="" val="1"/>
+              <ma14:placeholderFlag xmlns="" xmlns:ma14="http://schemas.microsoft.com/office/mac/drawingml/2011/main" val="1"/>
             </a:ext>
           </a:extLst>
         </p:spPr>
@@ -1800,14 +1800,14 @@
           <a:ln/>
           <a:extLst>
             <a:ext uri="{909E8E84-426E-40dd-AFC4-6F175D3DCCD1}">
-              <a14:hiddenFill xmlns:a14="http://schemas.microsoft.com/office/drawing/2010/main" xmlns="">
+              <a14:hiddenFill xmlns="" xmlns:a14="http://schemas.microsoft.com/office/drawing/2010/main">
                 <a:solidFill>
                   <a:srgbClr val="FFFFFF"/>
                 </a:solidFill>
               </a14:hiddenFill>
             </a:ext>
             <a:ext uri="{91240B29-F687-4f45-9708-019B960494DF}">
-              <a14:hiddenLine xmlns:a14="http://schemas.microsoft.com/office/drawing/2010/main" xmlns="" w="9525">
+              <a14:hiddenLine xmlns="" xmlns:a14="http://schemas.microsoft.com/office/drawing/2010/main" w="9525">
                 <a:solidFill>
                   <a:srgbClr val="000000"/>
                 </a:solidFill>
@@ -1983,14 +1983,14 @@
           <a:ln/>
           <a:extLst>
             <a:ext uri="{909E8E84-426E-40dd-AFC4-6F175D3DCCD1}">
-              <a14:hiddenFill xmlns:a14="http://schemas.microsoft.com/office/drawing/2010/main" xmlns="">
+              <a14:hiddenFill xmlns="" xmlns:a14="http://schemas.microsoft.com/office/drawing/2010/main">
                 <a:solidFill>
                   <a:srgbClr val="FFFFFF"/>
                 </a:solidFill>
               </a14:hiddenFill>
             </a:ext>
             <a:ext uri="{91240B29-F687-4f45-9708-019B960494DF}">
-              <a14:hiddenLine xmlns:a14="http://schemas.microsoft.com/office/drawing/2010/main" xmlns="" w="9525">
+              <a14:hiddenLine xmlns="" xmlns:a14="http://schemas.microsoft.com/office/drawing/2010/main" w="9525">
                 <a:solidFill>
                   <a:srgbClr val="000000"/>
                 </a:solidFill>
@@ -2000,7 +2000,7 @@
               </a14:hiddenLine>
             </a:ext>
             <a:ext uri="{FAA26D3D-D897-4be2-8F04-BA451C77F1D7}">
-              <ma14:placeholderFlag xmlns:ma14="http://schemas.microsoft.com/office/mac/drawingml/2011/main" xmlns="" val="1"/>
+              <ma14:placeholderFlag xmlns="" xmlns:ma14="http://schemas.microsoft.com/office/mac/drawingml/2011/main" val="1"/>
             </a:ext>
           </a:extLst>
         </p:spPr>
@@ -2061,14 +2061,14 @@
           <a:ln/>
           <a:extLst>
             <a:ext uri="{909E8E84-426E-40dd-AFC4-6F175D3DCCD1}">
-              <a14:hiddenFill xmlns:a14="http://schemas.microsoft.com/office/drawing/2010/main" xmlns="">
+              <a14:hiddenFill xmlns="" xmlns:a14="http://schemas.microsoft.com/office/drawing/2010/main">
                 <a:solidFill>
                   <a:srgbClr val="FFFFFF"/>
                 </a:solidFill>
               </a14:hiddenFill>
             </a:ext>
             <a:ext uri="{91240B29-F687-4f45-9708-019B960494DF}">
-              <a14:hiddenLine xmlns:a14="http://schemas.microsoft.com/office/drawing/2010/main" xmlns="" w="9525">
+              <a14:hiddenLine xmlns="" xmlns:a14="http://schemas.microsoft.com/office/drawing/2010/main" w="9525">
                 <a:solidFill>
                   <a:srgbClr val="000000"/>
                 </a:solidFill>
@@ -2244,14 +2244,14 @@
           <a:ln/>
           <a:extLst>
             <a:ext uri="{909E8E84-426E-40dd-AFC4-6F175D3DCCD1}">
-              <a14:hiddenFill xmlns:a14="http://schemas.microsoft.com/office/drawing/2010/main" xmlns="">
+              <a14:hiddenFill xmlns="" xmlns:a14="http://schemas.microsoft.com/office/drawing/2010/main">
                 <a:solidFill>
                   <a:srgbClr val="FFFFFF"/>
                 </a:solidFill>
               </a14:hiddenFill>
             </a:ext>
             <a:ext uri="{91240B29-F687-4f45-9708-019B960494DF}">
-              <a14:hiddenLine xmlns:a14="http://schemas.microsoft.com/office/drawing/2010/main" xmlns="" w="9525">
+              <a14:hiddenLine xmlns="" xmlns:a14="http://schemas.microsoft.com/office/drawing/2010/main" w="9525">
                 <a:solidFill>
                   <a:srgbClr val="000000"/>
                 </a:solidFill>
@@ -2261,7 +2261,7 @@
               </a14:hiddenLine>
             </a:ext>
             <a:ext uri="{FAA26D3D-D897-4be2-8F04-BA451C77F1D7}">
-              <ma14:placeholderFlag xmlns:ma14="http://schemas.microsoft.com/office/mac/drawingml/2011/main" xmlns="" val="1"/>
+              <ma14:placeholderFlag xmlns="" xmlns:ma14="http://schemas.microsoft.com/office/mac/drawingml/2011/main" val="1"/>
             </a:ext>
           </a:extLst>
         </p:spPr>
@@ -2322,14 +2322,14 @@
           <a:ln/>
           <a:extLst>
             <a:ext uri="{909E8E84-426E-40dd-AFC4-6F175D3DCCD1}">
-              <a14:hiddenFill xmlns:a14="http://schemas.microsoft.com/office/drawing/2010/main" xmlns="">
+              <a14:hiddenFill xmlns="" xmlns:a14="http://schemas.microsoft.com/office/drawing/2010/main">
                 <a:solidFill>
                   <a:srgbClr val="FFFFFF"/>
                 </a:solidFill>
               </a14:hiddenFill>
             </a:ext>
             <a:ext uri="{91240B29-F687-4f45-9708-019B960494DF}">
-              <a14:hiddenLine xmlns:a14="http://schemas.microsoft.com/office/drawing/2010/main" xmlns="" w="9525">
+              <a14:hiddenLine xmlns="" xmlns:a14="http://schemas.microsoft.com/office/drawing/2010/main" w="9525">
                 <a:solidFill>
                   <a:srgbClr val="000000"/>
                 </a:solidFill>
@@ -2505,14 +2505,14 @@
           <a:ln/>
           <a:extLst>
             <a:ext uri="{909E8E84-426E-40dd-AFC4-6F175D3DCCD1}">
-              <a14:hiddenFill xmlns:a14="http://schemas.microsoft.com/office/drawing/2010/main" xmlns="">
+              <a14:hiddenFill xmlns="" xmlns:a14="http://schemas.microsoft.com/office/drawing/2010/main">
                 <a:solidFill>
                   <a:srgbClr val="FFFFFF"/>
                 </a:solidFill>
               </a14:hiddenFill>
             </a:ext>
             <a:ext uri="{91240B29-F687-4f45-9708-019B960494DF}">
-              <a14:hiddenLine xmlns:a14="http://schemas.microsoft.com/office/drawing/2010/main" xmlns="" w="9525">
+              <a14:hiddenLine xmlns="" xmlns:a14="http://schemas.microsoft.com/office/drawing/2010/main" w="9525">
                 <a:solidFill>
                   <a:srgbClr val="000000"/>
                 </a:solidFill>
@@ -2522,7 +2522,7 @@
               </a14:hiddenLine>
             </a:ext>
             <a:ext uri="{FAA26D3D-D897-4be2-8F04-BA451C77F1D7}">
-              <ma14:placeholderFlag xmlns:ma14="http://schemas.microsoft.com/office/mac/drawingml/2011/main" xmlns="" val="1"/>
+              <ma14:placeholderFlag xmlns="" xmlns:ma14="http://schemas.microsoft.com/office/mac/drawingml/2011/main" val="1"/>
             </a:ext>
           </a:extLst>
         </p:spPr>
@@ -6263,8 +6263,8 @@
         </p:nvSpPr>
         <p:spPr bwMode="auto">
           <a:xfrm>
-            <a:off x="1676400" y="5337551"/>
-            <a:ext cx="6096000" cy="1077912"/>
+            <a:off x="1586888" y="5327041"/>
+            <a:ext cx="6096000" cy="584775"/>
           </a:xfrm>
           <a:prstGeom prst="rect">
             <a:avLst/>
@@ -6288,27 +6288,18 @@
               <a:defRPr/>
             </a:pPr>
             <a:r>
+              <a:rPr lang="ja-JP" altLang="en-US" sz="3200">
+                <a:ea typeface="ＭＳ Ｐゴシック" pitchFamily="-112" charset="-128"/>
+                <a:cs typeface="+mn-cs"/>
+              </a:rPr>
+              <a:t>篠埜　</a:t>
+            </a:r>
+            <a:r>
               <a:rPr lang="ja-JP" altLang="en-US" sz="3200" dirty="0">
                 <a:ea typeface="ＭＳ Ｐゴシック" pitchFamily="-112" charset="-128"/>
                 <a:cs typeface="+mn-cs"/>
               </a:rPr>
-              <a:t>情報工学科</a:t>
-            </a:r>
-            <a:endParaRPr lang="en-US" altLang="ja-JP" sz="3200" dirty="0">
-              <a:ea typeface="ＭＳ Ｐゴシック" pitchFamily="-112" charset="-128"/>
-              <a:cs typeface="+mn-cs"/>
-            </a:endParaRPr>
-          </a:p>
-          <a:p>
-            <a:pPr algn="ctr">
-              <a:defRPr/>
-            </a:pPr>
-            <a:r>
-              <a:rPr lang="ja-JP" altLang="en-US" sz="3200" dirty="0">
-                <a:ea typeface="ＭＳ Ｐゴシック" pitchFamily="-112" charset="-128"/>
-                <a:cs typeface="+mn-cs"/>
-              </a:rPr>
-              <a:t>篠埜　功</a:t>
+              <a:t>功</a:t>
             </a:r>
           </a:p>
         </p:txBody>
@@ -6408,7 +6399,7 @@
           </a:ln>
           <a:extLst>
             <a:ext uri="{909E8E84-426E-40dd-AFC4-6F175D3DCCD1}">
-              <a14:hiddenFill xmlns:a14="http://schemas.microsoft.com/office/drawing/2010/main" xmlns="">
+              <a14:hiddenFill xmlns="" xmlns:a14="http://schemas.microsoft.com/office/drawing/2010/main">
                 <a:solidFill>
                   <a:srgbClr val="FFFFFF"/>
                 </a:solidFill>
@@ -6614,14 +6605,14 @@
           </a:ln>
           <a:extLst>
             <a:ext uri="{909E8E84-426E-40dd-AFC4-6F175D3DCCD1}">
-              <a14:hiddenFill xmlns:a14="http://schemas.microsoft.com/office/drawing/2010/main" xmlns="">
+              <a14:hiddenFill xmlns="" xmlns:a14="http://schemas.microsoft.com/office/drawing/2010/main">
                 <a:solidFill>
                   <a:srgbClr val="FFFFFF"/>
                 </a:solidFill>
               </a14:hiddenFill>
             </a:ext>
             <a:ext uri="{91240B29-F687-4f45-9708-019B960494DF}">
-              <a14:hiddenLine xmlns:a14="http://schemas.microsoft.com/office/drawing/2010/main" xmlns="" w="9525">
+              <a14:hiddenLine xmlns="" xmlns:a14="http://schemas.microsoft.com/office/drawing/2010/main" w="9525">
                 <a:solidFill>
                   <a:srgbClr val="000000"/>
                 </a:solidFill>
@@ -6880,14 +6871,14 @@
           </a:ln>
           <a:extLst>
             <a:ext uri="{909E8E84-426E-40dd-AFC4-6F175D3DCCD1}">
-              <a14:hiddenFill xmlns:a14="http://schemas.microsoft.com/office/drawing/2010/main" xmlns="">
+              <a14:hiddenFill xmlns="" xmlns:a14="http://schemas.microsoft.com/office/drawing/2010/main">
                 <a:solidFill>
                   <a:srgbClr val="FFFFFF"/>
                 </a:solidFill>
               </a14:hiddenFill>
             </a:ext>
             <a:ext uri="{91240B29-F687-4f45-9708-019B960494DF}">
-              <a14:hiddenLine xmlns:a14="http://schemas.microsoft.com/office/drawing/2010/main" xmlns="" w="9525">
+              <a14:hiddenLine xmlns="" xmlns:a14="http://schemas.microsoft.com/office/drawing/2010/main" w="9525">
                 <a:solidFill>
                   <a:srgbClr val="000000"/>
                 </a:solidFill>
@@ -7064,7 +7055,7 @@
           </a:ln>
           <a:extLst>
             <a:ext uri="{909E8E84-426E-40dd-AFC4-6F175D3DCCD1}">
-              <a14:hiddenFill xmlns:a14="http://schemas.microsoft.com/office/drawing/2010/main" xmlns="">
+              <a14:hiddenFill xmlns="" xmlns:a14="http://schemas.microsoft.com/office/drawing/2010/main">
                 <a:solidFill>
                   <a:srgbClr val="FFFFFF"/>
                 </a:solidFill>
@@ -7234,14 +7225,14 @@
           </a:ln>
           <a:extLst>
             <a:ext uri="{909E8E84-426E-40dd-AFC4-6F175D3DCCD1}">
-              <a14:hiddenFill xmlns:a14="http://schemas.microsoft.com/office/drawing/2010/main" xmlns="">
+              <a14:hiddenFill xmlns="" xmlns:a14="http://schemas.microsoft.com/office/drawing/2010/main">
                 <a:solidFill>
                   <a:srgbClr val="FFFFFF"/>
                 </a:solidFill>
               </a14:hiddenFill>
             </a:ext>
             <a:ext uri="{91240B29-F687-4f45-9708-019B960494DF}">
-              <a14:hiddenLine xmlns:a14="http://schemas.microsoft.com/office/drawing/2010/main" xmlns="" w="9525">
+              <a14:hiddenLine xmlns="" xmlns:a14="http://schemas.microsoft.com/office/drawing/2010/main" w="9525">
                 <a:solidFill>
                   <a:srgbClr val="000000"/>
                 </a:solidFill>
@@ -7586,14 +7577,14 @@
             </a:ln>
             <a:extLst>
               <a:ext uri="{909E8E84-426E-40dd-AFC4-6F175D3DCCD1}">
-                <a14:hiddenFill xmlns:a14="http://schemas.microsoft.com/office/drawing/2010/main" xmlns="">
+                <a14:hiddenFill xmlns="" xmlns:a14="http://schemas.microsoft.com/office/drawing/2010/main">
                   <a:solidFill>
                     <a:srgbClr val="FFFFFF"/>
                   </a:solidFill>
                 </a14:hiddenFill>
               </a:ext>
               <a:ext uri="{91240B29-F687-4f45-9708-019B960494DF}">
-                <a14:hiddenLine xmlns:a14="http://schemas.microsoft.com/office/drawing/2010/main" xmlns="" w="9525">
+                <a14:hiddenLine xmlns="" xmlns:a14="http://schemas.microsoft.com/office/drawing/2010/main" w="9525">
                   <a:solidFill>
                     <a:srgbClr val="000000"/>
                   </a:solidFill>
@@ -7771,14 +7762,14 @@
           </a:ln>
           <a:extLst>
             <a:ext uri="{909E8E84-426E-40dd-AFC4-6F175D3DCCD1}">
-              <a14:hiddenFill xmlns:a14="http://schemas.microsoft.com/office/drawing/2010/main" xmlns="">
+              <a14:hiddenFill xmlns="" xmlns:a14="http://schemas.microsoft.com/office/drawing/2010/main">
                 <a:solidFill>
                   <a:srgbClr val="FFFFFF"/>
                 </a:solidFill>
               </a14:hiddenFill>
             </a:ext>
             <a:ext uri="{91240B29-F687-4f45-9708-019B960494DF}">
-              <a14:hiddenLine xmlns:a14="http://schemas.microsoft.com/office/drawing/2010/main" xmlns="" w="9525">
+              <a14:hiddenLine xmlns="" xmlns:a14="http://schemas.microsoft.com/office/drawing/2010/main" w="9525">
                 <a:solidFill>
                   <a:srgbClr val="000000"/>
                 </a:solidFill>
@@ -8005,14 +7996,14 @@
             </a:ln>
             <a:extLst>
               <a:ext uri="{909E8E84-426E-40dd-AFC4-6F175D3DCCD1}">
-                <a14:hiddenFill xmlns:a14="http://schemas.microsoft.com/office/drawing/2010/main" xmlns="">
+                <a14:hiddenFill xmlns="" xmlns:a14="http://schemas.microsoft.com/office/drawing/2010/main">
                   <a:solidFill>
                     <a:srgbClr val="FFFFFF"/>
                   </a:solidFill>
                 </a14:hiddenFill>
               </a:ext>
               <a:ext uri="{91240B29-F687-4f45-9708-019B960494DF}">
-                <a14:hiddenLine xmlns:a14="http://schemas.microsoft.com/office/drawing/2010/main" xmlns="" w="9525">
+                <a14:hiddenLine xmlns="" xmlns:a14="http://schemas.microsoft.com/office/drawing/2010/main" w="9525">
                   <a:solidFill>
                     <a:srgbClr val="000000"/>
                   </a:solidFill>
@@ -8195,7 +8186,7 @@
           </a:ln>
           <a:extLst>
             <a:ext uri="{909E8E84-426E-40dd-AFC4-6F175D3DCCD1}">
-              <a14:hiddenFill xmlns:a14="http://schemas.microsoft.com/office/drawing/2010/main" xmlns="">
+              <a14:hiddenFill xmlns="" xmlns:a14="http://schemas.microsoft.com/office/drawing/2010/main">
                 <a:noFill/>
               </a14:hiddenFill>
             </a:ext>
@@ -8231,14 +8222,14 @@
           </a:ln>
           <a:extLst>
             <a:ext uri="{909E8E84-426E-40dd-AFC4-6F175D3DCCD1}">
-              <a14:hiddenFill xmlns:a14="http://schemas.microsoft.com/office/drawing/2010/main" xmlns="">
+              <a14:hiddenFill xmlns="" xmlns:a14="http://schemas.microsoft.com/office/drawing/2010/main">
                 <a:solidFill>
                   <a:srgbClr val="FFFFFF"/>
                 </a:solidFill>
               </a14:hiddenFill>
             </a:ext>
             <a:ext uri="{91240B29-F687-4f45-9708-019B960494DF}">
-              <a14:hiddenLine xmlns:a14="http://schemas.microsoft.com/office/drawing/2010/main" xmlns="" w="9525">
+              <a14:hiddenLine xmlns="" xmlns:a14="http://schemas.microsoft.com/office/drawing/2010/main" w="9525">
                 <a:solidFill>
                   <a:srgbClr val="000000"/>
                 </a:solidFill>
@@ -8406,14 +8397,14 @@
           </a:ln>
           <a:extLst>
             <a:ext uri="{909E8E84-426E-40dd-AFC4-6F175D3DCCD1}">
-              <a14:hiddenFill xmlns:a14="http://schemas.microsoft.com/office/drawing/2010/main" xmlns="">
+              <a14:hiddenFill xmlns="" xmlns:a14="http://schemas.microsoft.com/office/drawing/2010/main">
                 <a:solidFill>
                   <a:srgbClr val="FFFFFF"/>
                 </a:solidFill>
               </a14:hiddenFill>
             </a:ext>
             <a:ext uri="{91240B29-F687-4f45-9708-019B960494DF}">
-              <a14:hiddenLine xmlns:a14="http://schemas.microsoft.com/office/drawing/2010/main" xmlns="" w="9525">
+              <a14:hiddenLine xmlns="" xmlns:a14="http://schemas.microsoft.com/office/drawing/2010/main" w="9525">
                 <a:solidFill>
                   <a:srgbClr val="000000"/>
                 </a:solidFill>
@@ -8637,14 +8628,14 @@
           </a:ln>
           <a:extLst>
             <a:ext uri="{909E8E84-426E-40dd-AFC4-6F175D3DCCD1}">
-              <a14:hiddenFill xmlns:a14="http://schemas.microsoft.com/office/drawing/2010/main" xmlns="">
+              <a14:hiddenFill xmlns="" xmlns:a14="http://schemas.microsoft.com/office/drawing/2010/main">
                 <a:solidFill>
                   <a:srgbClr val="FFFFFF"/>
                 </a:solidFill>
               </a14:hiddenFill>
             </a:ext>
             <a:ext uri="{91240B29-F687-4f45-9708-019B960494DF}">
-              <a14:hiddenLine xmlns:a14="http://schemas.microsoft.com/office/drawing/2010/main" xmlns="" w="9525">
+              <a14:hiddenLine xmlns="" xmlns:a14="http://schemas.microsoft.com/office/drawing/2010/main" w="9525">
                 <a:solidFill>
                   <a:srgbClr val="000000"/>
                 </a:solidFill>
@@ -8913,7 +8904,7 @@
           </a:ln>
           <a:extLst>
             <a:ext uri="{909E8E84-426E-40dd-AFC4-6F175D3DCCD1}">
-              <a14:hiddenFill xmlns:a14="http://schemas.microsoft.com/office/drawing/2010/main" xmlns="">
+              <a14:hiddenFill xmlns="" xmlns:a14="http://schemas.microsoft.com/office/drawing/2010/main">
                 <a:noFill/>
               </a14:hiddenFill>
             </a:ext>
@@ -9791,14 +9782,14 @@
           </a:ln>
           <a:extLst>
             <a:ext uri="{909E8E84-426E-40dd-AFC4-6F175D3DCCD1}">
-              <a14:hiddenFill xmlns:a14="http://schemas.microsoft.com/office/drawing/2010/main" xmlns="">
+              <a14:hiddenFill xmlns="" xmlns:a14="http://schemas.microsoft.com/office/drawing/2010/main">
                 <a:solidFill>
                   <a:srgbClr val="FFFFFF"/>
                 </a:solidFill>
               </a14:hiddenFill>
             </a:ext>
             <a:ext uri="{91240B29-F687-4f45-9708-019B960494DF}">
-              <a14:hiddenLine xmlns:a14="http://schemas.microsoft.com/office/drawing/2010/main" xmlns="" w="9525">
+              <a14:hiddenLine xmlns="" xmlns:a14="http://schemas.microsoft.com/office/drawing/2010/main" w="9525">
                 <a:solidFill>
                   <a:srgbClr val="000000"/>
                 </a:solidFill>
@@ -10016,14 +10007,14 @@
           </a:ln>
           <a:extLst>
             <a:ext uri="{909E8E84-426E-40dd-AFC4-6F175D3DCCD1}">
-              <a14:hiddenFill xmlns:a14="http://schemas.microsoft.com/office/drawing/2010/main" xmlns="">
+              <a14:hiddenFill xmlns="" xmlns:a14="http://schemas.microsoft.com/office/drawing/2010/main">
                 <a:solidFill>
                   <a:srgbClr val="FFFFFF"/>
                 </a:solidFill>
               </a14:hiddenFill>
             </a:ext>
             <a:ext uri="{91240B29-F687-4f45-9708-019B960494DF}">
-              <a14:hiddenLine xmlns:a14="http://schemas.microsoft.com/office/drawing/2010/main" xmlns="" w="9525">
+              <a14:hiddenLine xmlns="" xmlns:a14="http://schemas.microsoft.com/office/drawing/2010/main" w="9525">
                 <a:solidFill>
                   <a:srgbClr val="000000"/>
                 </a:solidFill>
@@ -10910,14 +10901,14 @@
           </a:ln>
           <a:extLst>
             <a:ext uri="{909E8E84-426E-40dd-AFC4-6F175D3DCCD1}">
-              <a14:hiddenFill xmlns:a14="http://schemas.microsoft.com/office/drawing/2010/main" xmlns="">
+              <a14:hiddenFill xmlns="" xmlns:a14="http://schemas.microsoft.com/office/drawing/2010/main">
                 <a:solidFill>
                   <a:srgbClr val="FFFFFF"/>
                 </a:solidFill>
               </a14:hiddenFill>
             </a:ext>
             <a:ext uri="{91240B29-F687-4f45-9708-019B960494DF}">
-              <a14:hiddenLine xmlns:a14="http://schemas.microsoft.com/office/drawing/2010/main" xmlns="" w="9525">
+              <a14:hiddenLine xmlns="" xmlns:a14="http://schemas.microsoft.com/office/drawing/2010/main" w="9525">
                 <a:solidFill>
                   <a:srgbClr val="000000"/>
                 </a:solidFill>
@@ -11295,14 +11286,14 @@
           </a:ln>
           <a:extLst>
             <a:ext uri="{909E8E84-426E-40dd-AFC4-6F175D3DCCD1}">
-              <a14:hiddenFill xmlns:a14="http://schemas.microsoft.com/office/drawing/2010/main" xmlns="">
+              <a14:hiddenFill xmlns="" xmlns:a14="http://schemas.microsoft.com/office/drawing/2010/main">
                 <a:solidFill>
                   <a:srgbClr val="FFFFFF"/>
                 </a:solidFill>
               </a14:hiddenFill>
             </a:ext>
             <a:ext uri="{91240B29-F687-4f45-9708-019B960494DF}">
-              <a14:hiddenLine xmlns:a14="http://schemas.microsoft.com/office/drawing/2010/main" xmlns="" w="9525">
+              <a14:hiddenLine xmlns="" xmlns:a14="http://schemas.microsoft.com/office/drawing/2010/main" w="9525">
                 <a:solidFill>
                   <a:srgbClr val="000000"/>
                 </a:solidFill>
@@ -11779,14 +11770,14 @@
           </a:ln>
           <a:extLst>
             <a:ext uri="{909E8E84-426E-40dd-AFC4-6F175D3DCCD1}">
-              <a14:hiddenFill xmlns:a14="http://schemas.microsoft.com/office/drawing/2010/main" xmlns="">
+              <a14:hiddenFill xmlns="" xmlns:a14="http://schemas.microsoft.com/office/drawing/2010/main">
                 <a:solidFill>
                   <a:srgbClr val="FFFFFF"/>
                 </a:solidFill>
               </a14:hiddenFill>
             </a:ext>
             <a:ext uri="{91240B29-F687-4f45-9708-019B960494DF}">
-              <a14:hiddenLine xmlns:a14="http://schemas.microsoft.com/office/drawing/2010/main" xmlns="" w="9525">
+              <a14:hiddenLine xmlns="" xmlns:a14="http://schemas.microsoft.com/office/drawing/2010/main" w="9525">
                 <a:solidFill>
                   <a:srgbClr val="000000"/>
                 </a:solidFill>
@@ -12003,14 +11994,14 @@
           </a:ln>
           <a:extLst>
             <a:ext uri="{909E8E84-426E-40dd-AFC4-6F175D3DCCD1}">
-              <a14:hiddenFill xmlns:a14="http://schemas.microsoft.com/office/drawing/2010/main" xmlns="">
+              <a14:hiddenFill xmlns="" xmlns:a14="http://schemas.microsoft.com/office/drawing/2010/main">
                 <a:solidFill>
                   <a:srgbClr val="FFFFFF"/>
                 </a:solidFill>
               </a14:hiddenFill>
             </a:ext>
             <a:ext uri="{91240B29-F687-4f45-9708-019B960494DF}">
-              <a14:hiddenLine xmlns:a14="http://schemas.microsoft.com/office/drawing/2010/main" xmlns="" w="9525">
+              <a14:hiddenLine xmlns="" xmlns:a14="http://schemas.microsoft.com/office/drawing/2010/main" w="9525">
                 <a:solidFill>
                   <a:srgbClr val="000000"/>
                 </a:solidFill>
@@ -12202,7 +12193,7 @@
           </a:ln>
           <a:extLst>
             <a:ext uri="{909E8E84-426E-40dd-AFC4-6F175D3DCCD1}">
-              <a14:hiddenFill xmlns:a14="http://schemas.microsoft.com/office/drawing/2010/main" xmlns="">
+              <a14:hiddenFill xmlns="" xmlns:a14="http://schemas.microsoft.com/office/drawing/2010/main">
                 <a:noFill/>
               </a14:hiddenFill>
             </a:ext>
@@ -12238,14 +12229,14 @@
           </a:ln>
           <a:extLst>
             <a:ext uri="{909E8E84-426E-40dd-AFC4-6F175D3DCCD1}">
-              <a14:hiddenFill xmlns:a14="http://schemas.microsoft.com/office/drawing/2010/main" xmlns="">
+              <a14:hiddenFill xmlns="" xmlns:a14="http://schemas.microsoft.com/office/drawing/2010/main">
                 <a:solidFill>
                   <a:srgbClr val="FFFFFF"/>
                 </a:solidFill>
               </a14:hiddenFill>
             </a:ext>
             <a:ext uri="{91240B29-F687-4f45-9708-019B960494DF}">
-              <a14:hiddenLine xmlns:a14="http://schemas.microsoft.com/office/drawing/2010/main" xmlns="" w="9525">
+              <a14:hiddenLine xmlns="" xmlns:a14="http://schemas.microsoft.com/office/drawing/2010/main" w="9525">
                 <a:solidFill>
                   <a:srgbClr val="000000"/>
                 </a:solidFill>
@@ -12451,7 +12442,7 @@
             </a:ln>
             <a:extLst>
               <a:ext uri="{909E8E84-426E-40dd-AFC4-6F175D3DCCD1}">
-                <a14:hiddenFill xmlns:a14="http://schemas.microsoft.com/office/drawing/2010/main" xmlns="">
+                <a14:hiddenFill xmlns="" xmlns:a14="http://schemas.microsoft.com/office/drawing/2010/main">
                   <a:noFill/>
                 </a14:hiddenFill>
               </a:ext>
@@ -12487,14 +12478,14 @@
             </a:ln>
             <a:extLst>
               <a:ext uri="{909E8E84-426E-40dd-AFC4-6F175D3DCCD1}">
-                <a14:hiddenFill xmlns:a14="http://schemas.microsoft.com/office/drawing/2010/main" xmlns="">
+                <a14:hiddenFill xmlns="" xmlns:a14="http://schemas.microsoft.com/office/drawing/2010/main">
                   <a:solidFill>
                     <a:srgbClr val="FFFFFF"/>
                   </a:solidFill>
                 </a14:hiddenFill>
               </a:ext>
               <a:ext uri="{91240B29-F687-4f45-9708-019B960494DF}">
-                <a14:hiddenLine xmlns:a14="http://schemas.microsoft.com/office/drawing/2010/main" xmlns="" w="9525">
+                <a14:hiddenLine xmlns="" xmlns:a14="http://schemas.microsoft.com/office/drawing/2010/main" w="9525">
                   <a:solidFill>
                     <a:srgbClr val="000000"/>
                   </a:solidFill>
@@ -12689,14 +12680,14 @@
             </a:ln>
             <a:extLst>
               <a:ext uri="{909E8E84-426E-40dd-AFC4-6F175D3DCCD1}">
-                <a14:hiddenFill xmlns:a14="http://schemas.microsoft.com/office/drawing/2010/main" xmlns="">
+                <a14:hiddenFill xmlns="" xmlns:a14="http://schemas.microsoft.com/office/drawing/2010/main">
                   <a:solidFill>
                     <a:srgbClr val="FFFFFF"/>
                   </a:solidFill>
                 </a14:hiddenFill>
               </a:ext>
               <a:ext uri="{91240B29-F687-4f45-9708-019B960494DF}">
-                <a14:hiddenLine xmlns:a14="http://schemas.microsoft.com/office/drawing/2010/main" xmlns="" w="9525">
+                <a14:hiddenLine xmlns="" xmlns:a14="http://schemas.microsoft.com/office/drawing/2010/main" w="9525">
                   <a:solidFill>
                     <a:srgbClr val="000000"/>
                   </a:solidFill>
@@ -12902,7 +12893,7 @@
             </a:ln>
             <a:extLst>
               <a:ext uri="{909E8E84-426E-40dd-AFC4-6F175D3DCCD1}">
-                <a14:hiddenFill xmlns:a14="http://schemas.microsoft.com/office/drawing/2010/main" xmlns="">
+                <a14:hiddenFill xmlns="" xmlns:a14="http://schemas.microsoft.com/office/drawing/2010/main">
                   <a:noFill/>
                 </a14:hiddenFill>
               </a:ext>
@@ -12944,7 +12935,7 @@
           </a:ln>
           <a:extLst>
             <a:ext uri="{909E8E84-426E-40dd-AFC4-6F175D3DCCD1}">
-              <a14:hiddenFill xmlns:a14="http://schemas.microsoft.com/office/drawing/2010/main" xmlns="">
+              <a14:hiddenFill xmlns="" xmlns:a14="http://schemas.microsoft.com/office/drawing/2010/main">
                 <a:noFill/>
               </a14:hiddenFill>
             </a:ext>
@@ -12985,7 +12976,7 @@
           </a:ln>
           <a:extLst>
             <a:ext uri="{909E8E84-426E-40dd-AFC4-6F175D3DCCD1}">
-              <a14:hiddenFill xmlns:a14="http://schemas.microsoft.com/office/drawing/2010/main" xmlns="">
+              <a14:hiddenFill xmlns="" xmlns:a14="http://schemas.microsoft.com/office/drawing/2010/main">
                 <a:noFill/>
               </a14:hiddenFill>
             </a:ext>
@@ -13021,14 +13012,14 @@
           </a:ln>
           <a:extLst>
             <a:ext uri="{909E8E84-426E-40dd-AFC4-6F175D3DCCD1}">
-              <a14:hiddenFill xmlns:a14="http://schemas.microsoft.com/office/drawing/2010/main" xmlns="">
+              <a14:hiddenFill xmlns="" xmlns:a14="http://schemas.microsoft.com/office/drawing/2010/main">
                 <a:solidFill>
                   <a:srgbClr val="FFFFFF"/>
                 </a:solidFill>
               </a14:hiddenFill>
             </a:ext>
             <a:ext uri="{91240B29-F687-4f45-9708-019B960494DF}">
-              <a14:hiddenLine xmlns:a14="http://schemas.microsoft.com/office/drawing/2010/main" xmlns="" w="9525">
+              <a14:hiddenLine xmlns="" xmlns:a14="http://schemas.microsoft.com/office/drawing/2010/main" w="9525">
                 <a:solidFill>
                   <a:srgbClr val="000000"/>
                 </a:solidFill>
@@ -13199,14 +13190,14 @@
           </a:ln>
           <a:extLst>
             <a:ext uri="{909E8E84-426E-40dd-AFC4-6F175D3DCCD1}">
-              <a14:hiddenFill xmlns:a14="http://schemas.microsoft.com/office/drawing/2010/main" xmlns="">
+              <a14:hiddenFill xmlns="" xmlns:a14="http://schemas.microsoft.com/office/drawing/2010/main">
                 <a:solidFill>
                   <a:srgbClr val="FFFFFF"/>
                 </a:solidFill>
               </a14:hiddenFill>
             </a:ext>
             <a:ext uri="{91240B29-F687-4f45-9708-019B960494DF}">
-              <a14:hiddenLine xmlns:a14="http://schemas.microsoft.com/office/drawing/2010/main" xmlns="" w="9525">
+              <a14:hiddenLine xmlns="" xmlns:a14="http://schemas.microsoft.com/office/drawing/2010/main" w="9525">
                 <a:solidFill>
                   <a:srgbClr val="000000"/>
                 </a:solidFill>
@@ -13398,7 +13389,7 @@
           </a:ln>
           <a:extLst>
             <a:ext uri="{909E8E84-426E-40dd-AFC4-6F175D3DCCD1}">
-              <a14:hiddenFill xmlns:a14="http://schemas.microsoft.com/office/drawing/2010/main" xmlns="">
+              <a14:hiddenFill xmlns="" xmlns:a14="http://schemas.microsoft.com/office/drawing/2010/main">
                 <a:solidFill>
                   <a:srgbClr val="FFFFFF"/>
                 </a:solidFill>
@@ -13585,7 +13576,7 @@
           </a:ln>
           <a:extLst>
             <a:ext uri="{909E8E84-426E-40dd-AFC4-6F175D3DCCD1}">
-              <a14:hiddenFill xmlns:a14="http://schemas.microsoft.com/office/drawing/2010/main" xmlns="">
+              <a14:hiddenFill xmlns="" xmlns:a14="http://schemas.microsoft.com/office/drawing/2010/main">
                 <a:solidFill>
                   <a:srgbClr val="FFFFFF"/>
                 </a:solidFill>
@@ -14237,14 +14228,14 @@
           </a:ln>
           <a:extLst>
             <a:ext uri="{909E8E84-426E-40dd-AFC4-6F175D3DCCD1}">
-              <a14:hiddenFill xmlns:a14="http://schemas.microsoft.com/office/drawing/2010/main" xmlns="">
+              <a14:hiddenFill xmlns="" xmlns:a14="http://schemas.microsoft.com/office/drawing/2010/main">
                 <a:solidFill>
                   <a:srgbClr val="FFFFFF"/>
                 </a:solidFill>
               </a14:hiddenFill>
             </a:ext>
             <a:ext uri="{91240B29-F687-4f45-9708-019B960494DF}">
-              <a14:hiddenLine xmlns:a14="http://schemas.microsoft.com/office/drawing/2010/main" xmlns="" w="9525">
+              <a14:hiddenLine xmlns="" xmlns:a14="http://schemas.microsoft.com/office/drawing/2010/main" w="9525">
                 <a:solidFill>
                   <a:srgbClr val="000000"/>
                 </a:solidFill>
@@ -14405,14 +14396,14 @@
           </a:ln>
           <a:extLst>
             <a:ext uri="{909E8E84-426E-40dd-AFC4-6F175D3DCCD1}">
-              <a14:hiddenFill xmlns:a14="http://schemas.microsoft.com/office/drawing/2010/main" xmlns="">
+              <a14:hiddenFill xmlns="" xmlns:a14="http://schemas.microsoft.com/office/drawing/2010/main">
                 <a:solidFill>
                   <a:srgbClr val="FFFFFF"/>
                 </a:solidFill>
               </a14:hiddenFill>
             </a:ext>
             <a:ext uri="{91240B29-F687-4f45-9708-019B960494DF}">
-              <a14:hiddenLine xmlns:a14="http://schemas.microsoft.com/office/drawing/2010/main" xmlns="" w="9525">
+              <a14:hiddenLine xmlns="" xmlns:a14="http://schemas.microsoft.com/office/drawing/2010/main" w="9525">
                 <a:solidFill>
                   <a:srgbClr val="000000"/>
                 </a:solidFill>
@@ -15334,14 +15325,14 @@
           </a:ln>
           <a:extLst>
             <a:ext uri="{909E8E84-426E-40dd-AFC4-6F175D3DCCD1}">
-              <a14:hiddenFill xmlns:a14="http://schemas.microsoft.com/office/drawing/2010/main" xmlns="">
+              <a14:hiddenFill xmlns="" xmlns:a14="http://schemas.microsoft.com/office/drawing/2010/main">
                 <a:solidFill>
                   <a:srgbClr val="FFFFFF"/>
                 </a:solidFill>
               </a14:hiddenFill>
             </a:ext>
             <a:ext uri="{91240B29-F687-4f45-9708-019B960494DF}">
-              <a14:hiddenLine xmlns:a14="http://schemas.microsoft.com/office/drawing/2010/main" xmlns="" w="9525">
+              <a14:hiddenLine xmlns="" xmlns:a14="http://schemas.microsoft.com/office/drawing/2010/main" w="9525">
                 <a:solidFill>
                   <a:srgbClr val="000000"/>
                 </a:solidFill>
@@ -15811,14 +15802,14 @@
           </a:ln>
           <a:extLst>
             <a:ext uri="{909E8E84-426E-40dd-AFC4-6F175D3DCCD1}">
-              <a14:hiddenFill xmlns:a14="http://schemas.microsoft.com/office/drawing/2010/main" xmlns="">
+              <a14:hiddenFill xmlns="" xmlns:a14="http://schemas.microsoft.com/office/drawing/2010/main">
                 <a:solidFill>
                   <a:srgbClr val="FFFFFF"/>
                 </a:solidFill>
               </a14:hiddenFill>
             </a:ext>
             <a:ext uri="{91240B29-F687-4f45-9708-019B960494DF}">
-              <a14:hiddenLine xmlns:a14="http://schemas.microsoft.com/office/drawing/2010/main" xmlns="" w="9525">
+              <a14:hiddenLine xmlns="" xmlns:a14="http://schemas.microsoft.com/office/drawing/2010/main" w="9525">
                 <a:solidFill>
                   <a:srgbClr val="000000"/>
                 </a:solidFill>
@@ -16061,14 +16052,14 @@
           </a:ln>
           <a:extLst>
             <a:ext uri="{909E8E84-426E-40dd-AFC4-6F175D3DCCD1}">
-              <a14:hiddenFill xmlns:a14="http://schemas.microsoft.com/office/drawing/2010/main" xmlns="">
+              <a14:hiddenFill xmlns="" xmlns:a14="http://schemas.microsoft.com/office/drawing/2010/main">
                 <a:solidFill>
                   <a:srgbClr val="FFFFFF"/>
                 </a:solidFill>
               </a14:hiddenFill>
             </a:ext>
             <a:ext uri="{91240B29-F687-4f45-9708-019B960494DF}">
-              <a14:hiddenLine xmlns:a14="http://schemas.microsoft.com/office/drawing/2010/main" xmlns="" w="9525">
+              <a14:hiddenLine xmlns="" xmlns:a14="http://schemas.microsoft.com/office/drawing/2010/main" w="9525">
                 <a:solidFill>
                   <a:srgbClr val="000000"/>
                 </a:solidFill>
@@ -16340,14 +16331,14 @@
           </a:ln>
           <a:extLst>
             <a:ext uri="{909E8E84-426E-40dd-AFC4-6F175D3DCCD1}">
-              <a14:hiddenFill xmlns:a14="http://schemas.microsoft.com/office/drawing/2010/main" xmlns="">
+              <a14:hiddenFill xmlns="" xmlns:a14="http://schemas.microsoft.com/office/drawing/2010/main">
                 <a:solidFill>
                   <a:srgbClr val="FFFFFF"/>
                 </a:solidFill>
               </a14:hiddenFill>
             </a:ext>
             <a:ext uri="{91240B29-F687-4f45-9708-019B960494DF}">
-              <a14:hiddenLine xmlns:a14="http://schemas.microsoft.com/office/drawing/2010/main" xmlns="" w="9525">
+              <a14:hiddenLine xmlns="" xmlns:a14="http://schemas.microsoft.com/office/drawing/2010/main" w="9525">
                 <a:solidFill>
                   <a:srgbClr val="000000"/>
                 </a:solidFill>
@@ -16977,14 +16968,14 @@
           </a:ln>
           <a:extLst>
             <a:ext uri="{909E8E84-426E-40dd-AFC4-6F175D3DCCD1}">
-              <a14:hiddenFill xmlns:a14="http://schemas.microsoft.com/office/drawing/2010/main" xmlns="">
+              <a14:hiddenFill xmlns="" xmlns:a14="http://schemas.microsoft.com/office/drawing/2010/main">
                 <a:solidFill>
                   <a:srgbClr val="FFFFFF"/>
                 </a:solidFill>
               </a14:hiddenFill>
             </a:ext>
             <a:ext uri="{91240B29-F687-4f45-9708-019B960494DF}">
-              <a14:hiddenLine xmlns:a14="http://schemas.microsoft.com/office/drawing/2010/main" xmlns="" w="9525">
+              <a14:hiddenLine xmlns="" xmlns:a14="http://schemas.microsoft.com/office/drawing/2010/main" w="9525">
                 <a:solidFill>
                   <a:srgbClr val="000000"/>
                 </a:solidFill>
@@ -17244,14 +17235,14 @@
           </a:ln>
           <a:extLst>
             <a:ext uri="{909E8E84-426E-40dd-AFC4-6F175D3DCCD1}">
-              <a14:hiddenFill xmlns:a14="http://schemas.microsoft.com/office/drawing/2010/main" xmlns="">
+              <a14:hiddenFill xmlns="" xmlns:a14="http://schemas.microsoft.com/office/drawing/2010/main">
                 <a:solidFill>
                   <a:srgbClr val="FFFFFF"/>
                 </a:solidFill>
               </a14:hiddenFill>
             </a:ext>
             <a:ext uri="{91240B29-F687-4f45-9708-019B960494DF}">
-              <a14:hiddenLine xmlns:a14="http://schemas.microsoft.com/office/drawing/2010/main" xmlns="" w="9525">
+              <a14:hiddenLine xmlns="" xmlns:a14="http://schemas.microsoft.com/office/drawing/2010/main" w="9525">
                 <a:solidFill>
                   <a:srgbClr val="000000"/>
                 </a:solidFill>
@@ -17563,14 +17554,14 @@
           </a:ln>
           <a:extLst>
             <a:ext uri="{909E8E84-426E-40dd-AFC4-6F175D3DCCD1}">
-              <a14:hiddenFill xmlns:a14="http://schemas.microsoft.com/office/drawing/2010/main" xmlns="">
+              <a14:hiddenFill xmlns="" xmlns:a14="http://schemas.microsoft.com/office/drawing/2010/main">
                 <a:solidFill>
                   <a:srgbClr val="FFFFFF"/>
                 </a:solidFill>
               </a14:hiddenFill>
             </a:ext>
             <a:ext uri="{91240B29-F687-4f45-9708-019B960494DF}">
-              <a14:hiddenLine xmlns:a14="http://schemas.microsoft.com/office/drawing/2010/main" xmlns="" w="9525">
+              <a14:hiddenLine xmlns="" xmlns:a14="http://schemas.microsoft.com/office/drawing/2010/main" w="9525">
                 <a:solidFill>
                   <a:srgbClr val="000000"/>
                 </a:solidFill>
@@ -19228,14 +19219,14 @@
           </a:ln>
           <a:extLst>
             <a:ext uri="{909E8E84-426E-40dd-AFC4-6F175D3DCCD1}">
-              <a14:hiddenFill xmlns:a14="http://schemas.microsoft.com/office/drawing/2010/main" xmlns="">
+              <a14:hiddenFill xmlns="" xmlns:a14="http://schemas.microsoft.com/office/drawing/2010/main">
                 <a:solidFill>
                   <a:srgbClr val="FFFFFF"/>
                 </a:solidFill>
               </a14:hiddenFill>
             </a:ext>
             <a:ext uri="{91240B29-F687-4f45-9708-019B960494DF}">
-              <a14:hiddenLine xmlns:a14="http://schemas.microsoft.com/office/drawing/2010/main" xmlns="" w="9525">
+              <a14:hiddenLine xmlns="" xmlns:a14="http://schemas.microsoft.com/office/drawing/2010/main" w="9525">
                 <a:solidFill>
                   <a:srgbClr val="000000"/>
                 </a:solidFill>
@@ -19490,14 +19481,14 @@
           </a:ln>
           <a:extLst>
             <a:ext uri="{909E8E84-426E-40dd-AFC4-6F175D3DCCD1}">
-              <a14:hiddenFill xmlns:a14="http://schemas.microsoft.com/office/drawing/2010/main" xmlns="">
+              <a14:hiddenFill xmlns="" xmlns:a14="http://schemas.microsoft.com/office/drawing/2010/main">
                 <a:solidFill>
                   <a:srgbClr val="FFFFFF"/>
                 </a:solidFill>
               </a14:hiddenFill>
             </a:ext>
             <a:ext uri="{91240B29-F687-4f45-9708-019B960494DF}">
-              <a14:hiddenLine xmlns:a14="http://schemas.microsoft.com/office/drawing/2010/main" xmlns="" w="9525">
+              <a14:hiddenLine xmlns="" xmlns:a14="http://schemas.microsoft.com/office/drawing/2010/main" w="9525">
                 <a:solidFill>
                   <a:srgbClr val="000000"/>
                 </a:solidFill>
@@ -19756,14 +19747,14 @@
           </a:ln>
           <a:extLst>
             <a:ext uri="{909E8E84-426E-40dd-AFC4-6F175D3DCCD1}">
-              <a14:hiddenFill xmlns:a14="http://schemas.microsoft.com/office/drawing/2010/main" xmlns="">
+              <a14:hiddenFill xmlns="" xmlns:a14="http://schemas.microsoft.com/office/drawing/2010/main">
                 <a:solidFill>
                   <a:srgbClr val="FFFFFF"/>
                 </a:solidFill>
               </a14:hiddenFill>
             </a:ext>
             <a:ext uri="{91240B29-F687-4f45-9708-019B960494DF}">
-              <a14:hiddenLine xmlns:a14="http://schemas.microsoft.com/office/drawing/2010/main" xmlns="" w="9525">
+              <a14:hiddenLine xmlns="" xmlns:a14="http://schemas.microsoft.com/office/drawing/2010/main" w="9525">
                 <a:solidFill>
                   <a:srgbClr val="000000"/>
                 </a:solidFill>
@@ -20097,14 +20088,14 @@
           </a:ln>
           <a:extLst>
             <a:ext uri="{909E8E84-426E-40dd-AFC4-6F175D3DCCD1}">
-              <a14:hiddenFill xmlns:a14="http://schemas.microsoft.com/office/drawing/2010/main" xmlns="">
+              <a14:hiddenFill xmlns="" xmlns:a14="http://schemas.microsoft.com/office/drawing/2010/main">
                 <a:solidFill>
                   <a:srgbClr val="FFFFFF"/>
                 </a:solidFill>
               </a14:hiddenFill>
             </a:ext>
             <a:ext uri="{91240B29-F687-4f45-9708-019B960494DF}">
-              <a14:hiddenLine xmlns:a14="http://schemas.microsoft.com/office/drawing/2010/main" xmlns="" w="9525">
+              <a14:hiddenLine xmlns="" xmlns:a14="http://schemas.microsoft.com/office/drawing/2010/main" w="9525">
                 <a:solidFill>
                   <a:srgbClr val="000000"/>
                 </a:solidFill>
@@ -20273,14 +20264,14 @@
           </a:ln>
           <a:extLst>
             <a:ext uri="{909E8E84-426E-40dd-AFC4-6F175D3DCCD1}">
-              <a14:hiddenFill xmlns:a14="http://schemas.microsoft.com/office/drawing/2010/main" xmlns="">
+              <a14:hiddenFill xmlns="" xmlns:a14="http://schemas.microsoft.com/office/drawing/2010/main">
                 <a:solidFill>
                   <a:srgbClr val="FFFFFF"/>
                 </a:solidFill>
               </a14:hiddenFill>
             </a:ext>
             <a:ext uri="{91240B29-F687-4f45-9708-019B960494DF}">
-              <a14:hiddenLine xmlns:a14="http://schemas.microsoft.com/office/drawing/2010/main" xmlns="" w="9525">
+              <a14:hiddenLine xmlns="" xmlns:a14="http://schemas.microsoft.com/office/drawing/2010/main" w="9525">
                 <a:solidFill>
                   <a:srgbClr val="000000"/>
                 </a:solidFill>
@@ -21279,14 +21270,14 @@
           </a:ln>
           <a:extLst>
             <a:ext uri="{909E8E84-426E-40dd-AFC4-6F175D3DCCD1}">
-              <a14:hiddenFill xmlns:a14="http://schemas.microsoft.com/office/drawing/2010/main" xmlns="">
+              <a14:hiddenFill xmlns="" xmlns:a14="http://schemas.microsoft.com/office/drawing/2010/main">
                 <a:solidFill>
                   <a:srgbClr val="FFFFFF"/>
                 </a:solidFill>
               </a14:hiddenFill>
             </a:ext>
             <a:ext uri="{91240B29-F687-4f45-9708-019B960494DF}">
-              <a14:hiddenLine xmlns:a14="http://schemas.microsoft.com/office/drawing/2010/main" xmlns="" w="9525">
+              <a14:hiddenLine xmlns="" xmlns:a14="http://schemas.microsoft.com/office/drawing/2010/main" w="9525">
                 <a:solidFill>
                   <a:srgbClr val="000000"/>
                 </a:solidFill>
@@ -21620,14 +21611,14 @@
           </a:ln>
           <a:extLst>
             <a:ext uri="{909E8E84-426E-40dd-AFC4-6F175D3DCCD1}">
-              <a14:hiddenFill xmlns:a14="http://schemas.microsoft.com/office/drawing/2010/main" xmlns="">
+              <a14:hiddenFill xmlns="" xmlns:a14="http://schemas.microsoft.com/office/drawing/2010/main">
                 <a:solidFill>
                   <a:srgbClr val="FFFFFF"/>
                 </a:solidFill>
               </a14:hiddenFill>
             </a:ext>
             <a:ext uri="{91240B29-F687-4f45-9708-019B960494DF}">
-              <a14:hiddenLine xmlns:a14="http://schemas.microsoft.com/office/drawing/2010/main" xmlns="" w="9525">
+              <a14:hiddenLine xmlns="" xmlns:a14="http://schemas.microsoft.com/office/drawing/2010/main" w="9525">
                 <a:solidFill>
                   <a:srgbClr val="000000"/>
                 </a:solidFill>
@@ -21877,14 +21868,14 @@
           </a:ln>
           <a:extLst>
             <a:ext uri="{909E8E84-426E-40dd-AFC4-6F175D3DCCD1}">
-              <a14:hiddenFill xmlns:a14="http://schemas.microsoft.com/office/drawing/2010/main" xmlns="">
+              <a14:hiddenFill xmlns="" xmlns:a14="http://schemas.microsoft.com/office/drawing/2010/main">
                 <a:solidFill>
                   <a:srgbClr val="FFFFFF"/>
                 </a:solidFill>
               </a14:hiddenFill>
             </a:ext>
             <a:ext uri="{91240B29-F687-4f45-9708-019B960494DF}">
-              <a14:hiddenLine xmlns:a14="http://schemas.microsoft.com/office/drawing/2010/main" xmlns="" w="9525">
+              <a14:hiddenLine xmlns="" xmlns:a14="http://schemas.microsoft.com/office/drawing/2010/main" w="9525">
                 <a:solidFill>
                   <a:srgbClr val="000000"/>
                 </a:solidFill>
@@ -23438,14 +23429,14 @@
           </a:ln>
           <a:extLst>
             <a:ext uri="{909E8E84-426E-40dd-AFC4-6F175D3DCCD1}">
-              <a14:hiddenFill xmlns:a14="http://schemas.microsoft.com/office/drawing/2010/main" xmlns="">
+              <a14:hiddenFill xmlns="" xmlns:a14="http://schemas.microsoft.com/office/drawing/2010/main">
                 <a:solidFill>
                   <a:srgbClr val="FFFFFF"/>
                 </a:solidFill>
               </a14:hiddenFill>
             </a:ext>
             <a:ext uri="{91240B29-F687-4f45-9708-019B960494DF}">
-              <a14:hiddenLine xmlns:a14="http://schemas.microsoft.com/office/drawing/2010/main" xmlns="" w="9525">
+              <a14:hiddenLine xmlns="" xmlns:a14="http://schemas.microsoft.com/office/drawing/2010/main" w="9525">
                 <a:solidFill>
                   <a:srgbClr val="000000"/>
                 </a:solidFill>
@@ -23631,14 +23622,14 @@
           </a:ln>
           <a:extLst>
             <a:ext uri="{909E8E84-426E-40dd-AFC4-6F175D3DCCD1}">
-              <a14:hiddenFill xmlns:a14="http://schemas.microsoft.com/office/drawing/2010/main" xmlns="">
+              <a14:hiddenFill xmlns="" xmlns:a14="http://schemas.microsoft.com/office/drawing/2010/main">
                 <a:solidFill>
                   <a:srgbClr val="FFFFFF"/>
                 </a:solidFill>
               </a14:hiddenFill>
             </a:ext>
             <a:ext uri="{91240B29-F687-4f45-9708-019B960494DF}">
-              <a14:hiddenLine xmlns:a14="http://schemas.microsoft.com/office/drawing/2010/main" xmlns="" w="9525">
+              <a14:hiddenLine xmlns="" xmlns:a14="http://schemas.microsoft.com/office/drawing/2010/main" w="9525">
                 <a:solidFill>
                   <a:srgbClr val="000000"/>
                 </a:solidFill>
@@ -24412,7 +24403,7 @@
           </a:ln>
           <a:extLst>
             <a:ext uri="{909E8E84-426E-40dd-AFC4-6F175D3DCCD1}">
-              <a14:hiddenFill xmlns:a14="http://schemas.microsoft.com/office/drawing/2010/main" xmlns="">
+              <a14:hiddenFill xmlns="" xmlns:a14="http://schemas.microsoft.com/office/drawing/2010/main">
                 <a:solidFill>
                   <a:srgbClr val="FFFFFF"/>
                 </a:solidFill>
@@ -24662,14 +24653,14 @@
           </a:ln>
           <a:extLst>
             <a:ext uri="{909E8E84-426E-40dd-AFC4-6F175D3DCCD1}">
-              <a14:hiddenFill xmlns:a14="http://schemas.microsoft.com/office/drawing/2010/main" xmlns="">
+              <a14:hiddenFill xmlns="" xmlns:a14="http://schemas.microsoft.com/office/drawing/2010/main">
                 <a:solidFill>
                   <a:srgbClr val="FFFFFF"/>
                 </a:solidFill>
               </a14:hiddenFill>
             </a:ext>
             <a:ext uri="{91240B29-F687-4f45-9708-019B960494DF}">
-              <a14:hiddenLine xmlns:a14="http://schemas.microsoft.com/office/drawing/2010/main" xmlns="" w="9525">
+              <a14:hiddenLine xmlns="" xmlns:a14="http://schemas.microsoft.com/office/drawing/2010/main" w="9525">
                 <a:solidFill>
                   <a:srgbClr val="000000"/>
                 </a:solidFill>
@@ -24927,14 +24918,14 @@
           </a:ln>
           <a:extLst>
             <a:ext uri="{909E8E84-426E-40dd-AFC4-6F175D3DCCD1}">
-              <a14:hiddenFill xmlns:a14="http://schemas.microsoft.com/office/drawing/2010/main" xmlns="">
+              <a14:hiddenFill xmlns="" xmlns:a14="http://schemas.microsoft.com/office/drawing/2010/main">
                 <a:solidFill>
                   <a:srgbClr val="FFFFFF"/>
                 </a:solidFill>
               </a14:hiddenFill>
             </a:ext>
             <a:ext uri="{91240B29-F687-4f45-9708-019B960494DF}">
-              <a14:hiddenLine xmlns:a14="http://schemas.microsoft.com/office/drawing/2010/main" xmlns="" w="9525">
+              <a14:hiddenLine xmlns="" xmlns:a14="http://schemas.microsoft.com/office/drawing/2010/main" w="9525">
                 <a:solidFill>
                   <a:srgbClr val="000000"/>
                 </a:solidFill>
@@ -25077,14 +25068,14 @@
           </a:ln>
           <a:extLst>
             <a:ext uri="{909E8E84-426E-40dd-AFC4-6F175D3DCCD1}">
-              <a14:hiddenFill xmlns:a14="http://schemas.microsoft.com/office/drawing/2010/main" xmlns="">
+              <a14:hiddenFill xmlns="" xmlns:a14="http://schemas.microsoft.com/office/drawing/2010/main">
                 <a:solidFill>
                   <a:srgbClr val="FFFFFF"/>
                 </a:solidFill>
               </a14:hiddenFill>
             </a:ext>
             <a:ext uri="{91240B29-F687-4f45-9708-019B960494DF}">
-              <a14:hiddenLine xmlns:a14="http://schemas.microsoft.com/office/drawing/2010/main" xmlns="" w="9525">
+              <a14:hiddenLine xmlns="" xmlns:a14="http://schemas.microsoft.com/office/drawing/2010/main" w="9525">
                 <a:solidFill>
                   <a:srgbClr val="000000"/>
                 </a:solidFill>
@@ -27164,14 +27155,14 @@
           </a:ln>
           <a:extLst>
             <a:ext uri="{909E8E84-426E-40dd-AFC4-6F175D3DCCD1}">
-              <a14:hiddenFill xmlns:a14="http://schemas.microsoft.com/office/drawing/2010/main" xmlns="">
+              <a14:hiddenFill xmlns="" xmlns:a14="http://schemas.microsoft.com/office/drawing/2010/main">
                 <a:solidFill>
                   <a:srgbClr val="FFFFFF"/>
                 </a:solidFill>
               </a14:hiddenFill>
             </a:ext>
             <a:ext uri="{91240B29-F687-4f45-9708-019B960494DF}">
-              <a14:hiddenLine xmlns:a14="http://schemas.microsoft.com/office/drawing/2010/main" xmlns="" w="9525">
+              <a14:hiddenLine xmlns="" xmlns:a14="http://schemas.microsoft.com/office/drawing/2010/main" w="9525">
                 <a:solidFill>
                   <a:srgbClr val="000000"/>
                 </a:solidFill>
@@ -27552,14 +27543,14 @@
           </a:ln>
           <a:extLst>
             <a:ext uri="{909E8E84-426E-40dd-AFC4-6F175D3DCCD1}">
-              <a14:hiddenFill xmlns:a14="http://schemas.microsoft.com/office/drawing/2010/main" xmlns="">
+              <a14:hiddenFill xmlns="" xmlns:a14="http://schemas.microsoft.com/office/drawing/2010/main">
                 <a:solidFill>
                   <a:srgbClr val="FFFFFF"/>
                 </a:solidFill>
               </a14:hiddenFill>
             </a:ext>
             <a:ext uri="{91240B29-F687-4f45-9708-019B960494DF}">
-              <a14:hiddenLine xmlns:a14="http://schemas.microsoft.com/office/drawing/2010/main" xmlns="" w="9525">
+              <a14:hiddenLine xmlns="" xmlns:a14="http://schemas.microsoft.com/office/drawing/2010/main" w="9525">
                 <a:solidFill>
                   <a:srgbClr val="000000"/>
                 </a:solidFill>
@@ -27945,14 +27936,14 @@
           </a:ln>
           <a:extLst>
             <a:ext uri="{909E8E84-426E-40dd-AFC4-6F175D3DCCD1}">
-              <a14:hiddenFill xmlns:a14="http://schemas.microsoft.com/office/drawing/2010/main" xmlns="">
+              <a14:hiddenFill xmlns="" xmlns:a14="http://schemas.microsoft.com/office/drawing/2010/main">
                 <a:solidFill>
                   <a:srgbClr val="FFFFFF"/>
                 </a:solidFill>
               </a14:hiddenFill>
             </a:ext>
             <a:ext uri="{91240B29-F687-4f45-9708-019B960494DF}">
-              <a14:hiddenLine xmlns:a14="http://schemas.microsoft.com/office/drawing/2010/main" xmlns="" w="9525">
+              <a14:hiddenLine xmlns="" xmlns:a14="http://schemas.microsoft.com/office/drawing/2010/main" w="9525">
                 <a:solidFill>
                   <a:srgbClr val="000000"/>
                 </a:solidFill>
@@ -29023,14 +29014,14 @@
           </a:ln>
           <a:extLst>
             <a:ext uri="{909E8E84-426E-40dd-AFC4-6F175D3DCCD1}">
-              <a14:hiddenFill xmlns:a14="http://schemas.microsoft.com/office/drawing/2010/main" xmlns="">
+              <a14:hiddenFill xmlns="" xmlns:a14="http://schemas.microsoft.com/office/drawing/2010/main">
                 <a:solidFill>
                   <a:srgbClr val="FFFFFF"/>
                 </a:solidFill>
               </a14:hiddenFill>
             </a:ext>
             <a:ext uri="{91240B29-F687-4f45-9708-019B960494DF}">
-              <a14:hiddenLine xmlns:a14="http://schemas.microsoft.com/office/drawing/2010/main" xmlns="" w="9525">
+              <a14:hiddenLine xmlns="" xmlns:a14="http://schemas.microsoft.com/office/drawing/2010/main" w="9525">
                 <a:solidFill>
                   <a:srgbClr val="000000"/>
                 </a:solidFill>
@@ -29781,14 +29772,14 @@
           </a:ln>
           <a:extLst>
             <a:ext uri="{909E8E84-426E-40dd-AFC4-6F175D3DCCD1}">
-              <a14:hiddenFill xmlns:a14="http://schemas.microsoft.com/office/drawing/2010/main" xmlns="">
+              <a14:hiddenFill xmlns="" xmlns:a14="http://schemas.microsoft.com/office/drawing/2010/main">
                 <a:solidFill>
                   <a:srgbClr val="FFFFFF"/>
                 </a:solidFill>
               </a14:hiddenFill>
             </a:ext>
             <a:ext uri="{91240B29-F687-4f45-9708-019B960494DF}">
-              <a14:hiddenLine xmlns:a14="http://schemas.microsoft.com/office/drawing/2010/main" xmlns="" w="9525">
+              <a14:hiddenLine xmlns="" xmlns:a14="http://schemas.microsoft.com/office/drawing/2010/main" w="9525">
                 <a:solidFill>
                   <a:srgbClr val="000000"/>
                 </a:solidFill>
@@ -30015,7 +30006,7 @@
           </a:ln>
           <a:extLst>
             <a:ext uri="{909E8E84-426E-40dd-AFC4-6F175D3DCCD1}">
-              <a14:hiddenFill xmlns:a14="http://schemas.microsoft.com/office/drawing/2010/main" xmlns="">
+              <a14:hiddenFill xmlns="" xmlns:a14="http://schemas.microsoft.com/office/drawing/2010/main">
                 <a:solidFill>
                   <a:srgbClr val="FFFFFF"/>
                 </a:solidFill>
@@ -30558,14 +30549,14 @@
           </a:ln>
           <a:extLst>
             <a:ext uri="{909E8E84-426E-40dd-AFC4-6F175D3DCCD1}">
-              <a14:hiddenFill xmlns:a14="http://schemas.microsoft.com/office/drawing/2010/main" xmlns="">
+              <a14:hiddenFill xmlns="" xmlns:a14="http://schemas.microsoft.com/office/drawing/2010/main">
                 <a:solidFill>
                   <a:srgbClr val="FFFFFF"/>
                 </a:solidFill>
               </a14:hiddenFill>
             </a:ext>
             <a:ext uri="{91240B29-F687-4f45-9708-019B960494DF}">
-              <a14:hiddenLine xmlns:a14="http://schemas.microsoft.com/office/drawing/2010/main" xmlns="" w="9525">
+              <a14:hiddenLine xmlns="" xmlns:a14="http://schemas.microsoft.com/office/drawing/2010/main" w="9525">
                 <a:solidFill>
                   <a:srgbClr val="000000"/>
                 </a:solidFill>
@@ -30726,14 +30717,14 @@
           </a:ln>
           <a:extLst>
             <a:ext uri="{909E8E84-426E-40dd-AFC4-6F175D3DCCD1}">
-              <a14:hiddenFill xmlns:a14="http://schemas.microsoft.com/office/drawing/2010/main" xmlns="">
+              <a14:hiddenFill xmlns="" xmlns:a14="http://schemas.microsoft.com/office/drawing/2010/main">
                 <a:solidFill>
                   <a:srgbClr val="FFFFFF"/>
                 </a:solidFill>
               </a14:hiddenFill>
             </a:ext>
             <a:ext uri="{91240B29-F687-4f45-9708-019B960494DF}">
-              <a14:hiddenLine xmlns:a14="http://schemas.microsoft.com/office/drawing/2010/main" xmlns="" w="9525">
+              <a14:hiddenLine xmlns="" xmlns:a14="http://schemas.microsoft.com/office/drawing/2010/main" w="9525">
                 <a:solidFill>
                   <a:srgbClr val="000000"/>
                 </a:solidFill>
@@ -30896,14 +30887,14 @@
           </a:ln>
           <a:extLst>
             <a:ext uri="{909E8E84-426E-40dd-AFC4-6F175D3DCCD1}">
-              <a14:hiddenFill xmlns:a14="http://schemas.microsoft.com/office/drawing/2010/main" xmlns="">
+              <a14:hiddenFill xmlns="" xmlns:a14="http://schemas.microsoft.com/office/drawing/2010/main">
                 <a:solidFill>
                   <a:srgbClr val="FFFFFF"/>
                 </a:solidFill>
               </a14:hiddenFill>
             </a:ext>
             <a:ext uri="{91240B29-F687-4f45-9708-019B960494DF}">
-              <a14:hiddenLine xmlns:a14="http://schemas.microsoft.com/office/drawing/2010/main" xmlns="" w="9525">
+              <a14:hiddenLine xmlns="" xmlns:a14="http://schemas.microsoft.com/office/drawing/2010/main" w="9525">
                 <a:solidFill>
                   <a:srgbClr val="000000"/>
                 </a:solidFill>
@@ -31158,14 +31149,14 @@
           </a:ln>
           <a:extLst>
             <a:ext uri="{909E8E84-426E-40dd-AFC4-6F175D3DCCD1}">
-              <a14:hiddenFill xmlns:a14="http://schemas.microsoft.com/office/drawing/2010/main" xmlns="">
+              <a14:hiddenFill xmlns="" xmlns:a14="http://schemas.microsoft.com/office/drawing/2010/main">
                 <a:solidFill>
                   <a:srgbClr val="FFFFFF"/>
                 </a:solidFill>
               </a14:hiddenFill>
             </a:ext>
             <a:ext uri="{91240B29-F687-4f45-9708-019B960494DF}">
-              <a14:hiddenLine xmlns:a14="http://schemas.microsoft.com/office/drawing/2010/main" xmlns="" w="9525">
+              <a14:hiddenLine xmlns="" xmlns:a14="http://schemas.microsoft.com/office/drawing/2010/main" w="9525">
                 <a:solidFill>
                   <a:srgbClr val="000000"/>
                 </a:solidFill>
@@ -31330,14 +31321,14 @@
           </a:ln>
           <a:extLst>
             <a:ext uri="{909E8E84-426E-40dd-AFC4-6F175D3DCCD1}">
-              <a14:hiddenFill xmlns:a14="http://schemas.microsoft.com/office/drawing/2010/main" xmlns="">
+              <a14:hiddenFill xmlns="" xmlns:a14="http://schemas.microsoft.com/office/drawing/2010/main">
                 <a:solidFill>
                   <a:srgbClr val="FFFFFF"/>
                 </a:solidFill>
               </a14:hiddenFill>
             </a:ext>
             <a:ext uri="{91240B29-F687-4f45-9708-019B960494DF}">
-              <a14:hiddenLine xmlns:a14="http://schemas.microsoft.com/office/drawing/2010/main" xmlns="" w="9525">
+              <a14:hiddenLine xmlns="" xmlns:a14="http://schemas.microsoft.com/office/drawing/2010/main" w="9525">
                 <a:solidFill>
                   <a:srgbClr val="000000"/>
                 </a:solidFill>
@@ -31506,14 +31497,14 @@
           </a:ln>
           <a:extLst>
             <a:ext uri="{909E8E84-426E-40dd-AFC4-6F175D3DCCD1}">
-              <a14:hiddenFill xmlns:a14="http://schemas.microsoft.com/office/drawing/2010/main" xmlns="">
+              <a14:hiddenFill xmlns="" xmlns:a14="http://schemas.microsoft.com/office/drawing/2010/main">
                 <a:solidFill>
                   <a:srgbClr val="FFFFFF"/>
                 </a:solidFill>
               </a14:hiddenFill>
             </a:ext>
             <a:ext uri="{91240B29-F687-4f45-9708-019B960494DF}">
-              <a14:hiddenLine xmlns:a14="http://schemas.microsoft.com/office/drawing/2010/main" xmlns="" w="9525">
+              <a14:hiddenLine xmlns="" xmlns:a14="http://schemas.microsoft.com/office/drawing/2010/main" w="9525">
                 <a:solidFill>
                   <a:srgbClr val="000000"/>
                 </a:solidFill>
@@ -31782,14 +31773,14 @@
           </a:ln>
           <a:extLst>
             <a:ext uri="{909E8E84-426E-40dd-AFC4-6F175D3DCCD1}">
-              <a14:hiddenFill xmlns:a14="http://schemas.microsoft.com/office/drawing/2010/main" xmlns="">
+              <a14:hiddenFill xmlns="" xmlns:a14="http://schemas.microsoft.com/office/drawing/2010/main">
                 <a:solidFill>
                   <a:srgbClr val="FFFFFF"/>
                 </a:solidFill>
               </a14:hiddenFill>
             </a:ext>
             <a:ext uri="{91240B29-F687-4f45-9708-019B960494DF}">
-              <a14:hiddenLine xmlns:a14="http://schemas.microsoft.com/office/drawing/2010/main" xmlns="" w="9525">
+              <a14:hiddenLine xmlns="" xmlns:a14="http://schemas.microsoft.com/office/drawing/2010/main" w="9525">
                 <a:solidFill>
                   <a:srgbClr val="000000"/>
                 </a:solidFill>
@@ -31856,7 +31847,7 @@
           </a:ln>
           <a:extLst>
             <a:ext uri="{909E8E84-426E-40dd-AFC4-6F175D3DCCD1}">
-              <a14:hiddenFill xmlns:a14="http://schemas.microsoft.com/office/drawing/2010/main" xmlns="">
+              <a14:hiddenFill xmlns="" xmlns:a14="http://schemas.microsoft.com/office/drawing/2010/main">
                 <a:solidFill>
                   <a:srgbClr val="FFFFFF"/>
                 </a:solidFill>
@@ -32012,7 +32003,7 @@
           </a:ln>
           <a:extLst>
             <a:ext uri="{909E8E84-426E-40dd-AFC4-6F175D3DCCD1}">
-              <a14:hiddenFill xmlns:a14="http://schemas.microsoft.com/office/drawing/2010/main" xmlns="">
+              <a14:hiddenFill xmlns="" xmlns:a14="http://schemas.microsoft.com/office/drawing/2010/main">
                 <a:solidFill>
                   <a:srgbClr val="FFFFFF"/>
                 </a:solidFill>
@@ -32094,14 +32085,14 @@
           </a:ln>
           <a:extLst>
             <a:ext uri="{909E8E84-426E-40dd-AFC4-6F175D3DCCD1}">
-              <a14:hiddenFill xmlns:a14="http://schemas.microsoft.com/office/drawing/2010/main" xmlns="">
+              <a14:hiddenFill xmlns="" xmlns:a14="http://schemas.microsoft.com/office/drawing/2010/main">
                 <a:solidFill>
                   <a:srgbClr val="FFFFFF"/>
                 </a:solidFill>
               </a14:hiddenFill>
             </a:ext>
             <a:ext uri="{91240B29-F687-4f45-9708-019B960494DF}">
-              <a14:hiddenLine xmlns:a14="http://schemas.microsoft.com/office/drawing/2010/main" xmlns="" w="9525">
+              <a14:hiddenLine xmlns="" xmlns:a14="http://schemas.microsoft.com/office/drawing/2010/main" w="9525">
                 <a:solidFill>
                   <a:srgbClr val="000000"/>
                 </a:solidFill>
@@ -32246,14 +32237,14 @@
           </a:ln>
           <a:extLst>
             <a:ext uri="{909E8E84-426E-40dd-AFC4-6F175D3DCCD1}">
-              <a14:hiddenFill xmlns:a14="http://schemas.microsoft.com/office/drawing/2010/main" xmlns="">
+              <a14:hiddenFill xmlns="" xmlns:a14="http://schemas.microsoft.com/office/drawing/2010/main">
                 <a:solidFill>
                   <a:srgbClr val="FFFFFF"/>
                 </a:solidFill>
               </a14:hiddenFill>
             </a:ext>
             <a:ext uri="{91240B29-F687-4f45-9708-019B960494DF}">
-              <a14:hiddenLine xmlns:a14="http://schemas.microsoft.com/office/drawing/2010/main" xmlns="" w="9525">
+              <a14:hiddenLine xmlns="" xmlns:a14="http://schemas.microsoft.com/office/drawing/2010/main" w="9525">
                 <a:solidFill>
                   <a:srgbClr val="000000"/>
                 </a:solidFill>
@@ -32416,14 +32407,14 @@
           </a:ln>
           <a:extLst>
             <a:ext uri="{909E8E84-426E-40dd-AFC4-6F175D3DCCD1}">
-              <a14:hiddenFill xmlns:a14="http://schemas.microsoft.com/office/drawing/2010/main" xmlns="">
+              <a14:hiddenFill xmlns="" xmlns:a14="http://schemas.microsoft.com/office/drawing/2010/main">
                 <a:solidFill>
                   <a:srgbClr val="FFFFFF"/>
                 </a:solidFill>
               </a14:hiddenFill>
             </a:ext>
             <a:ext uri="{91240B29-F687-4f45-9708-019B960494DF}">
-              <a14:hiddenLine xmlns:a14="http://schemas.microsoft.com/office/drawing/2010/main" xmlns="" w="9525">
+              <a14:hiddenLine xmlns="" xmlns:a14="http://schemas.microsoft.com/office/drawing/2010/main" w="9525">
                 <a:solidFill>
                   <a:srgbClr val="000000"/>
                 </a:solidFill>
@@ -32693,14 +32684,14 @@
           </a:ln>
           <a:extLst>
             <a:ext uri="{909E8E84-426E-40dd-AFC4-6F175D3DCCD1}">
-              <a14:hiddenFill xmlns:a14="http://schemas.microsoft.com/office/drawing/2010/main" xmlns="">
+              <a14:hiddenFill xmlns="" xmlns:a14="http://schemas.microsoft.com/office/drawing/2010/main">
                 <a:solidFill>
                   <a:srgbClr val="FFFFFF"/>
                 </a:solidFill>
               </a14:hiddenFill>
             </a:ext>
             <a:ext uri="{91240B29-F687-4f45-9708-019B960494DF}">
-              <a14:hiddenLine xmlns:a14="http://schemas.microsoft.com/office/drawing/2010/main" xmlns="" w="9525">
+              <a14:hiddenLine xmlns="" xmlns:a14="http://schemas.microsoft.com/office/drawing/2010/main" w="9525">
                 <a:solidFill>
                   <a:srgbClr val="000000"/>
                 </a:solidFill>
@@ -33355,14 +33346,14 @@
           </a:ln>
           <a:extLst>
             <a:ext uri="{909E8E84-426E-40dd-AFC4-6F175D3DCCD1}">
-              <a14:hiddenFill xmlns:a14="http://schemas.microsoft.com/office/drawing/2010/main" xmlns="">
+              <a14:hiddenFill xmlns="" xmlns:a14="http://schemas.microsoft.com/office/drawing/2010/main">
                 <a:solidFill>
                   <a:srgbClr val="FFFFFF"/>
                 </a:solidFill>
               </a14:hiddenFill>
             </a:ext>
             <a:ext uri="{91240B29-F687-4f45-9708-019B960494DF}">
-              <a14:hiddenLine xmlns:a14="http://schemas.microsoft.com/office/drawing/2010/main" xmlns="" w="9525">
+              <a14:hiddenLine xmlns="" xmlns:a14="http://schemas.microsoft.com/office/drawing/2010/main" w="9525">
                 <a:solidFill>
                   <a:srgbClr val="000000"/>
                 </a:solidFill>

--- a/~sasano/lecture/pn2/26/P01.pptx
+++ b/~sasano/lecture/pn2/26/P01.pptx
@@ -15068,14 +15068,14 @@
                 <a:latin typeface="Syntax" charset="0"/>
                 <a:cs typeface="ＭＳ Ｐゴシック" charset="0"/>
               </a:rPr>
-              <a:t>火曜日　</a:t>
+              <a:t>火曜日</a:t>
             </a:r>
             <a:r>
               <a:rPr kumimoji="0" lang="en-US" altLang="ja-JP" sz="2400" dirty="0">
                 <a:latin typeface="Syntax" charset="0"/>
                 <a:cs typeface="ＭＳ Ｐゴシック" charset="0"/>
               </a:rPr>
-              <a:t>3</a:t>
+              <a:t> 3</a:t>
             </a:r>
             <a:r>
               <a:rPr kumimoji="0" lang="ja-JP" altLang="en-US" sz="2400" dirty="0">
@@ -15102,7 +15102,7 @@
           <a:p>
             <a:pPr lvl="1">
               <a:lnSpc>
-                <a:spcPct val="90000"/>
+                <a:spcPct val="100000"/>
               </a:lnSpc>
             </a:pPr>
             <a:r>
@@ -15122,6 +15122,14 @@
               <a:t>号館</a:t>
             </a:r>
             <a:r>
+              <a:rPr lang="ja-JP" altLang="ja-JP" sz="2400"/>
+              <a:t>2B04,2B05教室</a:t>
+            </a:r>
+            <a:r>
+              <a:rPr lang="ja-JP" altLang="en-US" sz="2400"/>
+              <a:t>（旧</a:t>
+            </a:r>
+            <a:r>
               <a:rPr lang="en-US" altLang="zh-TW" sz="2400" dirty="0">
                 <a:latin typeface="Syntax" charset="0"/>
                 <a:ea typeface="ヒラギノ角ゴ Pro W3" charset="0"/>
@@ -15146,23 +15154,12 @@
               <a:t>4,5</a:t>
             </a:r>
             <a:r>
-              <a:rPr lang="en-US" altLang="zh-TW" sz="2400" dirty="0">
-                <a:solidFill>
-                  <a:srgbClr val="FF0000"/>
-                </a:solidFill>
-                <a:latin typeface="Syntax" charset="0"/>
-                <a:ea typeface="ヒラギノ角ゴ Pro W3" charset="0"/>
-                <a:cs typeface="ヒラギノ角ゴ Pro W3" charset="0"/>
-              </a:rPr>
-              <a:t> </a:t>
-            </a:r>
-            <a:r>
               <a:rPr lang="zh-TW" altLang="en-US" sz="2400" dirty="0">
                 <a:latin typeface="Syntax" charset="0"/>
                 <a:ea typeface="ヒラギノ角ゴ Pro W3" charset="0"/>
                 <a:cs typeface="ヒラギノ角ゴ Pro W3" charset="0"/>
               </a:rPr>
-              <a:t>および</a:t>
+              <a:t>）および</a:t>
             </a:r>
             <a:r>
               <a:rPr lang="en-US" altLang="zh-TW" sz="2400" dirty="0">
@@ -15170,7 +15167,7 @@
                 <a:ea typeface="ヒラギノ角ゴ Pro W3" charset="0"/>
                 <a:cs typeface="ヒラギノ角ゴ Pro W3" charset="0"/>
               </a:rPr>
-              <a:t> zoom</a:t>
+              <a:t>zoom</a:t>
             </a:r>
           </a:p>
           <a:p>
@@ -32924,7 +32921,7 @@
         <p:spPr/>
         <p:txBody>
           <a:bodyPr>
-            <a:normAutofit lnSpcReduction="10000"/>
+            <a:normAutofit fontScale="92500" lnSpcReduction="10000"/>
           </a:bodyPr>
           <a:lstStyle/>
           <a:p>
@@ -32956,7 +32953,7 @@
             </a:r>
             <a:r>
               <a:rPr lang="ja-JP" altLang="en-US"/>
-              <a:t>やメールで）渡すのはやめてください。</a:t>
+              <a:t>やメール等で）渡すのはやめてください。（受け取った人がそのまま提出する事例が何件もあります）</a:t>
             </a:r>
             <a:endParaRPr kumimoji="1" lang="ja-JP" altLang="en-US"/>
           </a:p>
